--- a/talk/CMAI_2026_Garibli.pptx
+++ b/talk/CMAI_2026_Garibli.pptx
@@ -1076,7 +1076,7 @@
           <a:lstStyle/>
           <a:p>
             <a:r>
-              <a:t>The memorable moment of the talk. Slow down. Two sentences: 326 vs 1 is a direct count, it depends on no statistical test. And demanding the Latin alphabet in the prompt moves only 12 of the 326.</a:t>
+              <a:t>The memorable moment of the talk. Slow down. Two sentences: 326 vs 0 is a direct count, it depends on no statistical test. And demanding the Latin alphabet in the prompt moves only 12 of the 326.</a:t>
             </a:r>
           </a:p>
         </p:txBody>
@@ -8184,7 +8184,7 @@
         </p:nvGraphicFramePr>
         <p:xfrm>
           <a:off x="640080" y="2514600"/>
-          <a:ext cx="10881360" cy="1536192"/>
+          <a:ext cx="10881360" cy="1920240"/>
         </p:xfrm>
         <a:graphic>
           <a:graphicData uri="http://schemas.openxmlformats.org/drawingml/2006/table">
@@ -8412,7 +8412,7 @@
                           </a:solidFill>
                           <a:latin typeface="Segoe UI"/>
                         </a:rPr>
-                        <a:t>0.0016</a:t>
+                        <a:t>0.0020</a:t>
                       </a:r>
                     </a:p>
                   </a:txBody>
@@ -8524,7 +8524,119 @@
                           </a:solidFill>
                           <a:latin typeface="Segoe UI"/>
                         </a:rPr>
-                        <a:t>0.0016</a:t>
+                        <a:t>0.0020</a:t>
+                      </a:r>
+                    </a:p>
+                  </a:txBody>
+                  <a:tcPr>
+                    <a:solidFill>
+                      <a:srgbClr val="FCFCFB"/>
+                    </a:solidFill>
+                  </a:tcPr>
+                </a:tc>
+              </a:tr>
+              <a:tr h="384048">
+                <a:tc>
+                  <a:txBody>
+                    <a:bodyPr/>
+                    <a:lstStyle/>
+                    <a:p>
+                      <a:r>
+                        <a:rPr sz="1700" b="0">
+                          <a:solidFill>
+                            <a:srgbClr val="52514E"/>
+                          </a:solidFill>
+                          <a:latin typeface="Segoe UI"/>
+                        </a:rPr>
+                        <a:t>Qwen3-VL-4B-Thinking</a:t>
+                      </a:r>
+                    </a:p>
+                  </a:txBody>
+                  <a:tcPr>
+                    <a:solidFill>
+                      <a:srgbClr val="FCFCFB"/>
+                    </a:solidFill>
+                  </a:tcPr>
+                </a:tc>
+                <a:tc>
+                  <a:txBody>
+                    <a:bodyPr/>
+                    <a:lstStyle/>
+                    <a:p>
+                      <a:r>
+                        <a:rPr sz="1700" b="0">
+                          <a:solidFill>
+                            <a:srgbClr val="52514E"/>
+                          </a:solidFill>
+                          <a:latin typeface="Segoe UI"/>
+                        </a:rPr>
+                        <a:t>12.6%</a:t>
+                      </a:r>
+                    </a:p>
+                  </a:txBody>
+                  <a:tcPr>
+                    <a:solidFill>
+                      <a:srgbClr val="FCFCFB"/>
+                    </a:solidFill>
+                  </a:tcPr>
+                </a:tc>
+                <a:tc>
+                  <a:txBody>
+                    <a:bodyPr/>
+                    <a:lstStyle/>
+                    <a:p>
+                      <a:r>
+                        <a:rPr sz="1700" b="0">
+                          <a:solidFill>
+                            <a:srgbClr val="52514E"/>
+                          </a:solidFill>
+                          <a:latin typeface="Segoe UI"/>
+                        </a:rPr>
+                        <a:t>29.5%</a:t>
+                      </a:r>
+                    </a:p>
+                  </a:txBody>
+                  <a:tcPr>
+                    <a:solidFill>
+                      <a:srgbClr val="FCFCFB"/>
+                    </a:solidFill>
+                  </a:tcPr>
+                </a:tc>
+                <a:tc>
+                  <a:txBody>
+                    <a:bodyPr/>
+                    <a:lstStyle/>
+                    <a:p>
+                      <a:r>
+                        <a:rPr sz="1700" b="0">
+                          <a:solidFill>
+                            <a:srgbClr val="52514E"/>
+                          </a:solidFill>
+                          <a:latin typeface="Segoe UI"/>
+                        </a:rPr>
+                        <a:t>16.9</a:t>
+                      </a:r>
+                    </a:p>
+                  </a:txBody>
+                  <a:tcPr>
+                    <a:solidFill>
+                      <a:srgbClr val="FCFCFB"/>
+                    </a:solidFill>
+                  </a:tcPr>
+                </a:tc>
+                <a:tc>
+                  <a:txBody>
+                    <a:bodyPr/>
+                    <a:lstStyle/>
+                    <a:p>
+                      <a:r>
+                        <a:rPr sz="1700" b="0">
+                          <a:solidFill>
+                            <a:srgbClr val="52514E"/>
+                          </a:solidFill>
+                          <a:latin typeface="Segoe UI"/>
+                        </a:rPr>
+                        <a:t>0.0020</a:t>
                       </a:r>
                     </a:p>
                   </a:txBody>
@@ -8636,7 +8748,7 @@
                           </a:solidFill>
                           <a:latin typeface="Segoe UI"/>
                         </a:rPr>
-                        <a:t>0.0016</a:t>
+                        <a:t>0.0020</a:t>
                       </a:r>
                     </a:p>
                   </a:txBody>
@@ -8893,7 +9005,7 @@
                 </a:solidFill>
                 <a:latin typeface="Segoe UI"/>
               </a:rPr>
-              <a:t>Holm-corrected p = 0.0024   ·   same architecture, same quantization, same prompt</a:t>
+              <a:t>Holm-corrected p = 0.0040   ·   its own declared base, same quantization, same prompt</a:t>
             </a:r>
           </a:p>
         </p:txBody>
@@ -9363,7 +9475,7 @@
                 </a:solidFill>
                 <a:latin typeface="Segoe UI"/>
               </a:rPr>
-              <a:t>Indistinguishable in English. 35.4 points apart in Azerbaijani.</a:t>
+              <a:t>Indistinguishable in English. 27.1 points apart in Azerbaijani - and transliteration closes it.</a:t>
             </a:r>
           </a:p>
         </p:txBody>
@@ -9378,7 +9490,7 @@
         </p:nvGraphicFramePr>
         <p:xfrm>
           <a:off x="640080" y="2514600"/>
-          <a:ext cx="10881360" cy="1152144"/>
+          <a:ext cx="10881360" cy="1536192"/>
         </p:xfrm>
         <a:graphic>
           <a:graphicData uri="http://schemas.openxmlformats.org/drawingml/2006/table">
@@ -9540,7 +9652,7 @@
                           </a:solidFill>
                           <a:latin typeface="Segoe UI"/>
                         </a:rPr>
-                        <a:t>59.4%</a:t>
+                        <a:t>62.5%</a:t>
                       </a:r>
                     </a:p>
                   </a:txBody>
@@ -9584,7 +9696,7 @@
                           </a:solidFill>
                           <a:latin typeface="Segoe UI"/>
                         </a:rPr>
-                        <a:t>0.0</a:t>
+                        <a:t>3.1</a:t>
                       </a:r>
                     </a:p>
                   </a:txBody>
@@ -9652,7 +9764,7 @@
                           </a:solidFill>
                           <a:latin typeface="Segoe UI"/>
                         </a:rPr>
-                        <a:t>45.8%</a:t>
+                        <a:t>37.5%</a:t>
                       </a:r>
                     </a:p>
                   </a:txBody>
@@ -9696,7 +9808,7 @@
                           </a:solidFill>
                           <a:latin typeface="Segoe UI"/>
                         </a:rPr>
-                        <a:t>35.4</a:t>
+                        <a:t>27.1</a:t>
                       </a:r>
                     </a:p>
                   </a:txBody>
@@ -9718,7 +9830,119 @@
                           </a:solidFill>
                           <a:latin typeface="Segoe UI"/>
                         </a:rPr>
-                        <a:t>0.0030</a:t>
+                        <a:t>0.0050</a:t>
+                      </a:r>
+                    </a:p>
+                  </a:txBody>
+                  <a:tcPr>
+                    <a:solidFill>
+                      <a:srgbClr val="FCFCFB"/>
+                    </a:solidFill>
+                  </a:tcPr>
+                </a:tc>
+              </a:tr>
+              <a:tr h="384048">
+                <a:tc>
+                  <a:txBody>
+                    <a:bodyPr/>
+                    <a:lstStyle/>
+                    <a:p>
+                      <a:r>
+                        <a:rPr sz="1700" b="0">
+                          <a:solidFill>
+                            <a:srgbClr val="52514E"/>
+                          </a:solidFill>
+                          <a:latin typeface="Segoe UI"/>
+                        </a:rPr>
+                        <a:t>Azerbaijani (TRANSLIT)</a:t>
+                      </a:r>
+                    </a:p>
+                  </a:txBody>
+                  <a:tcPr>
+                    <a:solidFill>
+                      <a:srgbClr val="FCFCFB"/>
+                    </a:solidFill>
+                  </a:tcPr>
+                </a:tc>
+                <a:tc>
+                  <a:txBody>
+                    <a:bodyPr/>
+                    <a:lstStyle/>
+                    <a:p>
+                      <a:r>
+                        <a:rPr sz="1700" b="0">
+                          <a:solidFill>
+                            <a:srgbClr val="52514E"/>
+                          </a:solidFill>
+                          <a:latin typeface="Segoe UI"/>
+                        </a:rPr>
+                        <a:t>38.5%</a:t>
+                      </a:r>
+                    </a:p>
+                  </a:txBody>
+                  <a:tcPr>
+                    <a:solidFill>
+                      <a:srgbClr val="FCFCFB"/>
+                    </a:solidFill>
+                  </a:tcPr>
+                </a:tc>
+                <a:tc>
+                  <a:txBody>
+                    <a:bodyPr/>
+                    <a:lstStyle/>
+                    <a:p>
+                      <a:r>
+                        <a:rPr sz="1700" b="0">
+                          <a:solidFill>
+                            <a:srgbClr val="52514E"/>
+                          </a:solidFill>
+                          <a:latin typeface="Segoe UI"/>
+                        </a:rPr>
+                        <a:t>33.3%</a:t>
+                      </a:r>
+                    </a:p>
+                  </a:txBody>
+                  <a:tcPr>
+                    <a:solidFill>
+                      <a:srgbClr val="FCFCFB"/>
+                    </a:solidFill>
+                  </a:tcPr>
+                </a:tc>
+                <a:tc>
+                  <a:txBody>
+                    <a:bodyPr/>
+                    <a:lstStyle/>
+                    <a:p>
+                      <a:r>
+                        <a:rPr sz="1700" b="0">
+                          <a:solidFill>
+                            <a:srgbClr val="52514E"/>
+                          </a:solidFill>
+                          <a:latin typeface="Segoe UI"/>
+                        </a:rPr>
+                        <a:t>5.2</a:t>
+                      </a:r>
+                    </a:p>
+                  </a:txBody>
+                  <a:tcPr>
+                    <a:solidFill>
+                      <a:srgbClr val="FCFCFB"/>
+                    </a:solidFill>
+                  </a:tcPr>
+                </a:tc>
+                <a:tc>
+                  <a:txBody>
+                    <a:bodyPr/>
+                    <a:lstStyle/>
+                    <a:p>
+                      <a:r>
+                        <a:rPr sz="1700" b="0">
+                          <a:solidFill>
+                            <a:srgbClr val="52514E"/>
+                          </a:solidFill>
+                          <a:latin typeface="Segoe UI"/>
+                        </a:rPr>
+                        <a:t>1.0000</a:t>
                       </a:r>
                     </a:p>
                   </a:txBody>
@@ -9741,8 +9965,8 @@
         </p:nvSpPr>
         <p:spPr>
           <a:xfrm>
-            <a:off x="640080" y="4206240"/>
-            <a:ext cx="10881360" cy="2011680"/>
+            <a:off x="640080" y="4663440"/>
+            <a:ext cx="10881360" cy="1554480"/>
           </a:xfrm>
           <a:prstGeom prst="rect">
             <a:avLst/>
